--- a/classes/parte-10-seguridad-en-la-nube-y-contenedores/222-iam-en-la-nube-identidades-roles-y-permisos/clase-222-presentacion.pptx
+++ b/classes/parte-10-seguridad-en-la-nube-y-contenedores/222-iam-en-la-nube-identidades-roles-y-permisos/clase-222-presentacion.pptx
@@ -17,6 +17,10 @@
     <p:sldId id="265" r:id="rId16"/>
     <p:sldId id="266" r:id="rId17"/>
     <p:sldId id="267" r:id="rId18"/>
+    <p:sldId id="268" r:id="rId19"/>
+    <p:sldId id="269" r:id="rId20"/>
+    <p:sldId id="270" r:id="rId21"/>
+    <p:sldId id="271" r:id="rId22"/>
   </p:sldIdLst>
   <p:sldSz cx="9144000" cy="6858000" type="screen4x3"/>
   <p:notesSz cx="6858000" cy="9144000"/>
@@ -3198,7 +3202,7 @@
                   <a:srgbClr val="0B3D2E"/>
                 </a:solidFill>
               </a:rPr>
-              <a:t>⚠️ Errores comunes</a:t>
+              <a:t>🧪 Laboratorio guiado</a:t>
             </a:r>
           </a:p>
         </p:txBody>
@@ -3236,67 +3240,97 @@
                   <a:srgbClr val="22282E"/>
                 </a:solidFill>
               </a:rPr>
-              <a:t>•  AccessDenied inesperado — SCP u organización deniega arriba; revisa políticas heredadas y deny explícitos.</a:t>
-            </a:r>
-          </a:p>
-          <a:p>
-            <a:pPr>
-              <a:spcAft>
-                <a:spcPts val="600"/>
-              </a:spcAft>
-            </a:pPr>
-            <a:r>
-              <a:rPr sz="1500">
-                <a:solidFill>
-                  <a:srgbClr val="22282E"/>
-                </a:solidFill>
-              </a:rPr>
-              <a:t>•  Política con "Action": "" en producción — Privilegio excesivo; refactoriza a acciones concretas y usa Access Analyzer.</a:t>
-            </a:r>
-          </a:p>
-          <a:p>
-            <a:pPr>
-              <a:spcAft>
-                <a:spcPts val="600"/>
-              </a:spcAft>
-            </a:pPr>
-            <a:r>
-              <a:rPr sz="1500">
-                <a:solidFill>
-                  <a:srgbClr val="22282E"/>
-                </a:solidFill>
-              </a:rPr>
-              <a:t>•  Claves de acceso en el código — Credenciales estáticas filtrables; migra a roles y rota/revoca de inmediato.</a:t>
-            </a:r>
-          </a:p>
-          <a:p>
-            <a:pPr>
-              <a:spcAft>
-                <a:spcPts val="600"/>
-              </a:spcAft>
-            </a:pPr>
-            <a:r>
-              <a:rPr sz="1500">
-                <a:solidFill>
-                  <a:srgbClr val="22282E"/>
-                </a:solidFill>
-              </a:rPr>
-              <a:t>•  iam:PassRole sin condición — Ruta de escalada; restringe con Condition sobre servicio y rol destino.</a:t>
-            </a:r>
-          </a:p>
-          <a:p>
-            <a:pPr>
-              <a:spcAft>
-                <a:spcPts val="600"/>
-              </a:spcAft>
-            </a:pPr>
-            <a:r>
-              <a:rPr sz="1500">
-                <a:solidFill>
-                  <a:srgbClr val="22282E"/>
-                </a:solidFill>
-              </a:rPr>
-              <a:t>•  Usuarios inactivos con claves activas — Falta de revisión; deshabilita credenciales sin uso &gt; 90 días.</a:t>
+              <a:t>•  Crea un usuario lab-user sin permisos y un rol lab-admin-role con AdministratorAccess.</a:t>
+            </a:r>
+          </a:p>
+          <a:p>
+            <a:pPr>
+              <a:spcAft>
+                <a:spcPts val="600"/>
+              </a:spcAft>
+            </a:pPr>
+            <a:r>
+              <a:rPr sz="1500">
+                <a:solidFill>
+                  <a:srgbClr val="22282E"/>
+                </a:solidFill>
+              </a:rPr>
+              <a:t>•  Adjunta a lab-user una política que solo permita iam:PassRole y ec2:RunInstances.</a:t>
+            </a:r>
+          </a:p>
+          <a:p>
+            <a:pPr>
+              <a:spcAft>
+                <a:spcPts val="600"/>
+              </a:spcAft>
+            </a:pPr>
+            <a:r>
+              <a:rPr sz="1500">
+                <a:solidFill>
+                  <a:srgbClr val="22282E"/>
+                </a:solidFill>
+              </a:rPr>
+              <a:t>•  Con PMapper, genera el grafo de la cuenta: pmapper graph create y luego pmapper query "who can do iam: with ". Observa cómo el usuario aparente-mínimo puede escalar a admin lanzando una instancia con…</a:t>
+            </a:r>
+          </a:p>
+          <a:p>
+            <a:pPr>
+              <a:spcAft>
+                <a:spcPts val="600"/>
+              </a:spcAft>
+            </a:pPr>
+            <a:r>
+              <a:rPr sz="1500">
+                <a:solidFill>
+                  <a:srgbClr val="22282E"/>
+                </a:solidFill>
+              </a:rPr>
+              <a:t>•  Reproduce la ruta manualmente: lanza una instancia EC2 pasando lab-admin-role y obtén sus credenciales temporales desde el servicio de metadatos.</a:t>
+            </a:r>
+          </a:p>
+          <a:p>
+            <a:pPr>
+              <a:spcAft>
+                <a:spcPts val="600"/>
+              </a:spcAft>
+            </a:pPr>
+            <a:r>
+              <a:rPr sz="1500">
+                <a:solidFill>
+                  <a:srgbClr val="22282E"/>
+                </a:solidFill>
+              </a:rPr>
+              <a:t>•  Mitiga: aplica un permission boundary a lab-user y añade una Condition que restrinja qué roles puede pasar (iam:PassedToService). Repite el ataque y verifica que ahora falla.</a:t>
+            </a:r>
+          </a:p>
+          <a:p>
+            <a:pPr>
+              <a:spcAft>
+                <a:spcPts val="600"/>
+              </a:spcAft>
+            </a:pPr>
+            <a:r>
+              <a:rPr sz="1500">
+                <a:solidFill>
+                  <a:srgbClr val="22282E"/>
+                </a:solidFill>
+              </a:rPr>
+              <a:t>•  Audita la cuenta con prowler aws -c iam y revisa hallazgos de claves inactivas y políticas con comodín .</a:t>
+            </a:r>
+          </a:p>
+          <a:p>
+            <a:pPr>
+              <a:spcAft>
+                <a:spcPts val="600"/>
+              </a:spcAft>
+            </a:pPr>
+            <a:r>
+              <a:rPr sz="1500">
+                <a:solidFill>
+                  <a:srgbClr val="22282E"/>
+                </a:solidFill>
+              </a:rPr>
+              <a:t>•  Elimina las credenciales de larga duración y sustitúyelas por roles asumibles.</a:t>
             </a:r>
           </a:p>
         </p:txBody>
@@ -3347,7 +3381,7 @@
                   <a:srgbClr val="0B3D2E"/>
                 </a:solidFill>
               </a:rPr>
-              <a:t>❓ Preguntas frecuentes</a:t>
+              <a:t>✍️ Ejercicios</a:t>
             </a:r>
           </a:p>
         </p:txBody>
@@ -3385,82 +3419,82 @@
                   <a:srgbClr val="22282E"/>
                 </a:solidFill>
               </a:rPr>
-              <a:t>•  ❓ ¿Rol o usuario para una aplicación?</a:t>
-            </a:r>
-          </a:p>
-          <a:p>
-            <a:pPr>
-              <a:spcAft>
-                <a:spcPts val="600"/>
-              </a:spcAft>
-            </a:pPr>
-            <a:r>
-              <a:rPr sz="1500">
-                <a:solidFill>
-                  <a:srgbClr val="22282E"/>
-                </a:solidFill>
-              </a:rPr>
-              <a:t>•  Siempre rol. Un rol da credenciales temporales que rotan solas; una clave de usuario es un secreto permanente que, si se filtra, sirve al atacante indefinidamente.</a:t>
-            </a:r>
-          </a:p>
-          <a:p>
-            <a:pPr>
-              <a:spcAft>
-                <a:spcPts val="600"/>
-              </a:spcAft>
-            </a:pPr>
-            <a:r>
-              <a:rPr sz="1500">
-                <a:solidFill>
-                  <a:srgbClr val="22282E"/>
-                </a:solidFill>
-              </a:rPr>
-              <a:t>•  ❓ ¿Qué pasa si una política de identidad permite algo y una de recurso lo deniega?</a:t>
-            </a:r>
-          </a:p>
-          <a:p>
-            <a:pPr>
-              <a:spcAft>
-                <a:spcPts val="600"/>
-              </a:spcAft>
-            </a:pPr>
-            <a:r>
-              <a:rPr sz="1500">
-                <a:solidFill>
-                  <a:srgbClr val="22282E"/>
-                </a:solidFill>
-              </a:rPr>
-              <a:t>•  Gana el deny. La evaluación combina todas las políticas aplicables y cualquier deny explícito prevalece sobre cualquier allow.</a:t>
-            </a:r>
-          </a:p>
-          <a:p>
-            <a:pPr>
-              <a:spcAft>
-                <a:spcPts val="600"/>
-              </a:spcAft>
-            </a:pPr>
-            <a:r>
-              <a:rPr sz="1500">
-                <a:solidFill>
-                  <a:srgbClr val="22282E"/>
-                </a:solidFill>
-              </a:rPr>
-              <a:t>•  ❓ ¿Cómo aplico privilegio mínimo sin frenar al equipo?</a:t>
-            </a:r>
-          </a:p>
-          <a:p>
-            <a:pPr>
-              <a:spcAft>
-                <a:spcPts val="600"/>
-              </a:spcAft>
-            </a:pPr>
-            <a:r>
-              <a:rPr sz="1500">
-                <a:solidFill>
-                  <a:srgbClr val="22282E"/>
-                </a:solidFill>
-              </a:rPr>
-              <a:t>•  Empieza permisivo pero mide: usa Access Analyzer/policy usage para ver qué se usa realmente y recorta lo no utilizado. Itera en vez de adivinar.</a:t>
+              <a:t>•  Escribe una política que permita listar un bucket concreto pero denegar borrar objetos.</a:t>
+            </a:r>
+          </a:p>
+          <a:p>
+            <a:pPr>
+              <a:spcAft>
+                <a:spcPts val="600"/>
+              </a:spcAft>
+            </a:pPr>
+            <a:r>
+              <a:rPr sz="1500">
+                <a:solidFill>
+                  <a:srgbClr val="22282E"/>
+                </a:solidFill>
+              </a:rPr>
+              <a:t>•  Convierte una integración basada en clave estática en un rol asumido por un servicio.</a:t>
+            </a:r>
+          </a:p>
+          <a:p>
+            <a:pPr>
+              <a:spcAft>
+                <a:spcPts val="600"/>
+              </a:spcAft>
+            </a:pPr>
+            <a:r>
+              <a:rPr sz="1500">
+                <a:solidFill>
+                  <a:srgbClr val="22282E"/>
+                </a:solidFill>
+              </a:rPr>
+              <a:t>•  Explica el resultado de una petición con un Deny explícito y un Allow simultáneos.</a:t>
+            </a:r>
+          </a:p>
+          <a:p>
+            <a:pPr>
+              <a:spcAft>
+                <a:spcPts val="600"/>
+              </a:spcAft>
+            </a:pPr>
+            <a:r>
+              <a:rPr sz="1500">
+                <a:solidFill>
+                  <a:srgbClr val="22282E"/>
+                </a:solidFill>
+              </a:rPr>
+              <a:t>•  Añade una Condition que exija MFA para acciones destructivas.</a:t>
+            </a:r>
+          </a:p>
+          <a:p>
+            <a:pPr>
+              <a:spcAft>
+                <a:spcPts val="600"/>
+              </a:spcAft>
+            </a:pPr>
+            <a:r>
+              <a:rPr sz="1500">
+                <a:solidFill>
+                  <a:srgbClr val="22282E"/>
+                </a:solidFill>
+              </a:rPr>
+              <a:t>•  Usa PMapper para identificar caminos hacia un rol privilegiado dentro de las cuentas y relaciones que la credencial auditora pudo observar; declara límites de cobertura.</a:t>
+            </a:r>
+          </a:p>
+          <a:p>
+            <a:pPr>
+              <a:spcAft>
+                <a:spcPts val="600"/>
+              </a:spcAft>
+            </a:pPr>
+            <a:r>
+              <a:rPr sz="1500">
+                <a:solidFill>
+                  <a:srgbClr val="22282E"/>
+                </a:solidFill>
+              </a:rPr>
+              <a:t>•  Diseña un esquema de permission boundaries para un equipo que autoadministra sus recursos.</a:t>
             </a:r>
           </a:p>
         </p:txBody>
@@ -3511,7 +3545,7 @@
                   <a:srgbClr val="0B3D2E"/>
                 </a:solidFill>
               </a:rPr>
-              <a:t>🔗 Referencias</a:t>
+              <a:t>📝 Reto verificable</a:t>
             </a:r>
           </a:p>
         </p:txBody>
@@ -3549,71 +3583,623 @@
                   <a:srgbClr val="22282E"/>
                 </a:solidFill>
               </a:rPr>
-              <a:t>•  AWS IAM User Guide. &lt;https://docs.aws.amazon.com/IAM/latest/UserGuide/&gt;</a:t>
-            </a:r>
-          </a:p>
-          <a:p>
-            <a:pPr>
-              <a:spcAft>
-                <a:spcPts val="600"/>
-              </a:spcAft>
-            </a:pPr>
-            <a:r>
-              <a:rPr sz="1500">
-                <a:solidFill>
-                  <a:srgbClr val="22282E"/>
-                </a:solidFill>
-              </a:rPr>
-              <a:t>•  AWS — IAM policy evaluation logic. &lt;https://docs.aws.amazon.com/IAM/latest/UserGuide/referencepoliciesevaluation-logic.html&gt;</a:t>
-            </a:r>
-          </a:p>
-          <a:p>
-            <a:pPr>
-              <a:spcAft>
-                <a:spcPts val="600"/>
-              </a:spcAft>
-            </a:pPr>
-            <a:r>
-              <a:rPr sz="1500">
-                <a:solidFill>
-                  <a:srgbClr val="22282E"/>
-                </a:solidFill>
-              </a:rPr>
-              <a:t>•  PMapper (Principal Mapper). &lt;https://github.com/nccgroup/PMapper&gt;</a:t>
-            </a:r>
-          </a:p>
-          <a:p>
-            <a:pPr>
-              <a:spcAft>
-                <a:spcPts val="600"/>
-              </a:spcAft>
-            </a:pPr>
-            <a:r>
-              <a:rPr sz="1500">
-                <a:solidFill>
-                  <a:srgbClr val="22282E"/>
-                </a:solidFill>
-              </a:rPr>
-              <a:t>•  Rhino Security Labs — AWS IAM privilege escalation methods. &lt;https://rhinosecuritylabs.com/aws/aws-privilege-escalation-methods-mitigation/&gt;</a:t>
-            </a:r>
-          </a:p>
-          <a:p>
-            <a:pPr>
-              <a:spcAft>
-                <a:spcPts val="600"/>
-              </a:spcAft>
-            </a:pPr>
-            <a:r>
-              <a:rPr sz="1500">
-                <a:solidFill>
-                  <a:srgbClr val="22282E"/>
-                </a:solidFill>
-              </a:rPr>
-              <a:t>•  Microsoft Entra ID docs. &lt;https://learn.microsoft.com/entra/identity/&gt;</a:t>
-            </a:r>
-          </a:p>
-        </p:txBody>
-      </p:sp>
+              <a:t>•  Parte de una política demasiado amplia ("Action": "", "Resource": "") y refactorízala a</a:t>
+            </a:r>
+          </a:p>
+          <a:p>
+            <a:pPr>
+              <a:spcAft>
+                <a:spcPts val="600"/>
+              </a:spcAft>
+            </a:pPr>
+            <a:r>
+              <a:rPr sz="1500">
+                <a:solidFill>
+                  <a:srgbClr val="22282E"/>
+                </a:solidFill>
+              </a:rPr>
+              <a:t>•  privilegio mínimo para un caso de uso concreto (una app que lee de una tabla y escribe en una cola).</a:t>
+            </a:r>
+          </a:p>
+          <a:p>
+            <a:pPr>
+              <a:spcAft>
+                <a:spcPts val="600"/>
+              </a:spcAft>
+            </a:pPr>
+            <a:r>
+              <a:rPr sz="1500">
+                <a:solidFill>
+                  <a:srgbClr val="22282E"/>
+                </a:solidFill>
+              </a:rPr>
+              <a:t>•  Criterio de aceptación: la política final solo incluye las acciones estrictamente necesarias sobre</a:t>
+            </a:r>
+          </a:p>
+          <a:p>
+            <a:pPr>
+              <a:spcAft>
+                <a:spcPts val="600"/>
+              </a:spcAft>
+            </a:pPr>
+            <a:r>
+              <a:rPr sz="1500">
+                <a:solidFill>
+                  <a:srgbClr val="22282E"/>
+                </a:solidFill>
+              </a:rPr>
+              <a:t>•  los ARNs concretos, incluye al menos una Condition, y simulate-principal-policy confirma que las</a:t>
+            </a:r>
+          </a:p>
+          <a:p>
+            <a:pPr>
+              <a:spcAft>
+                <a:spcPts val="600"/>
+              </a:spcAft>
+            </a:pPr>
+            <a:r>
+              <a:rPr sz="1500">
+                <a:solidFill>
+                  <a:srgbClr val="22282E"/>
+                </a:solidFill>
+              </a:rPr>
+              <a:t>•  acciones legítimas se permiten y una acción no relacionada se deniega.</a:t>
+            </a:r>
+          </a:p>
+        </p:txBody>
+      </p:sp>
+    </p:spTree>
+  </p:cSld>
+  <p:clrMapOvr>
+    <a:masterClrMapping/>
+  </p:clrMapOvr>
+</p:sld>
+</file>
+
+<file path=ppt/slides/slide13.xml><?xml version="1.0" encoding="utf-8"?>
+<p:sld xmlns:a="http://schemas.openxmlformats.org/drawingml/2006/main" xmlns:p="http://schemas.openxmlformats.org/presentationml/2006/main" xmlns:r="http://schemas.openxmlformats.org/officeDocument/2006/relationships">
+  <p:cSld>
+    <p:spTree>
+      <p:nvGrpSpPr>
+        <p:cNvPr id="1" name=""/>
+        <p:cNvGrpSpPr/>
+        <p:nvPr/>
+      </p:nvGrpSpPr>
+      <p:grpSpPr/>
+      <p:sp>
+        <p:nvSpPr>
+          <p:cNvPr id="2" name="TextBox 1"/>
+          <p:cNvSpPr txBox="1"/>
+          <p:nvPr/>
+        </p:nvSpPr>
+        <p:spPr>
+          <a:xfrm>
+            <a:off x="457200" y="320040"/>
+            <a:ext cx="8229600" cy="822960"/>
+          </a:xfrm>
+          <a:prstGeom prst="rect">
+            <a:avLst/>
+          </a:prstGeom>
+          <a:noFill/>
+        </p:spPr>
+        <p:txBody>
+          <a:bodyPr wrap="square">
+            <a:spAutoFit/>
+          </a:bodyPr>
+          <a:lstStyle/>
+          <a:p>
+            <a:r>
+              <a:rPr sz="2600" b="1">
+                <a:solidFill>
+                  <a:srgbClr val="0B3D2E"/>
+                </a:solidFill>
+              </a:rPr>
+              <a:t>⚠️ Errores comunes</a:t>
+            </a:r>
+          </a:p>
+        </p:txBody>
+      </p:sp>
+      <p:sp>
+        <p:nvSpPr>
+          <p:cNvPr id="3" name="TextBox 2"/>
+          <p:cNvSpPr txBox="1"/>
+          <p:nvPr/>
+        </p:nvSpPr>
+        <p:spPr>
+          <a:xfrm>
+            <a:off x="457200" y="1280160"/>
+            <a:ext cx="8229600" cy="4937760"/>
+          </a:xfrm>
+          <a:prstGeom prst="rect">
+            <a:avLst/>
+          </a:prstGeom>
+          <a:noFill/>
+        </p:spPr>
+        <p:txBody>
+          <a:bodyPr wrap="square">
+            <a:spAutoFit/>
+          </a:bodyPr>
+          <a:lstStyle/>
+          <a:p>
+            <a:pPr>
+              <a:spcAft>
+                <a:spcPts val="600"/>
+              </a:spcAft>
+            </a:pPr>
+            <a:r>
+              <a:rPr sz="1500">
+                <a:solidFill>
+                  <a:srgbClr val="22282E"/>
+                </a:solidFill>
+              </a:rPr>
+              <a:t>•  AccessDenied inesperado — SCP u organización deniega arriba; revisa políticas heredadas y deny explícitos.</a:t>
+            </a:r>
+          </a:p>
+          <a:p>
+            <a:pPr>
+              <a:spcAft>
+                <a:spcPts val="600"/>
+              </a:spcAft>
+            </a:pPr>
+            <a:r>
+              <a:rPr sz="1500">
+                <a:solidFill>
+                  <a:srgbClr val="22282E"/>
+                </a:solidFill>
+              </a:rPr>
+              <a:t>•  Política con "Action": "" en producción — Privilegio excesivo; refactoriza a acciones concretas y usa Access Analyzer.</a:t>
+            </a:r>
+          </a:p>
+          <a:p>
+            <a:pPr>
+              <a:spcAft>
+                <a:spcPts val="600"/>
+              </a:spcAft>
+            </a:pPr>
+            <a:r>
+              <a:rPr sz="1500">
+                <a:solidFill>
+                  <a:srgbClr val="22282E"/>
+                </a:solidFill>
+              </a:rPr>
+              <a:t>•  Claves de acceso en el código — Credenciales estáticas filtrables; migra a roles y rota/revoca de inmediato.</a:t>
+            </a:r>
+          </a:p>
+          <a:p>
+            <a:pPr>
+              <a:spcAft>
+                <a:spcPts val="600"/>
+              </a:spcAft>
+            </a:pPr>
+            <a:r>
+              <a:rPr sz="1500">
+                <a:solidFill>
+                  <a:srgbClr val="22282E"/>
+                </a:solidFill>
+              </a:rPr>
+              <a:t>•  iam:PassRole sin condición — Ruta de escalada; restringe con Condition sobre servicio y rol destino.</a:t>
+            </a:r>
+          </a:p>
+          <a:p>
+            <a:pPr>
+              <a:spcAft>
+                <a:spcPts val="600"/>
+              </a:spcAft>
+            </a:pPr>
+            <a:r>
+              <a:rPr sz="1500">
+                <a:solidFill>
+                  <a:srgbClr val="22282E"/>
+                </a:solidFill>
+              </a:rPr>
+              <a:t>•  Usuarios inactivos con claves activas — Falta de revisión; deshabilita credenciales sin uso &gt; 90 días.</a:t>
+            </a:r>
+          </a:p>
+        </p:txBody>
+      </p:sp>
+    </p:spTree>
+  </p:cSld>
+  <p:clrMapOvr>
+    <a:masterClrMapping/>
+  </p:clrMapOvr>
+</p:sld>
+</file>
+
+<file path=ppt/slides/slide14.xml><?xml version="1.0" encoding="utf-8"?>
+<p:sld xmlns:a="http://schemas.openxmlformats.org/drawingml/2006/main" xmlns:p="http://schemas.openxmlformats.org/presentationml/2006/main" xmlns:r="http://schemas.openxmlformats.org/officeDocument/2006/relationships">
+  <p:cSld>
+    <p:spTree>
+      <p:nvGrpSpPr>
+        <p:cNvPr id="1" name=""/>
+        <p:cNvGrpSpPr/>
+        <p:nvPr/>
+      </p:nvGrpSpPr>
+      <p:grpSpPr/>
+      <p:sp>
+        <p:nvSpPr>
+          <p:cNvPr id="2" name="TextBox 1"/>
+          <p:cNvSpPr txBox="1"/>
+          <p:nvPr/>
+        </p:nvSpPr>
+        <p:spPr>
+          <a:xfrm>
+            <a:off x="457200" y="320040"/>
+            <a:ext cx="8229600" cy="822960"/>
+          </a:xfrm>
+          <a:prstGeom prst="rect">
+            <a:avLst/>
+          </a:prstGeom>
+          <a:noFill/>
+        </p:spPr>
+        <p:txBody>
+          <a:bodyPr wrap="square">
+            <a:spAutoFit/>
+          </a:bodyPr>
+          <a:lstStyle/>
+          <a:p>
+            <a:r>
+              <a:rPr sz="2600" b="1">
+                <a:solidFill>
+                  <a:srgbClr val="0B3D2E"/>
+                </a:solidFill>
+              </a:rPr>
+              <a:t>❓ Preguntas frecuentes</a:t>
+            </a:r>
+          </a:p>
+        </p:txBody>
+      </p:sp>
+      <p:sp>
+        <p:nvSpPr>
+          <p:cNvPr id="3" name="TextBox 2"/>
+          <p:cNvSpPr txBox="1"/>
+          <p:nvPr/>
+        </p:nvSpPr>
+        <p:spPr>
+          <a:xfrm>
+            <a:off x="457200" y="1280160"/>
+            <a:ext cx="8229600" cy="4937760"/>
+          </a:xfrm>
+          <a:prstGeom prst="rect">
+            <a:avLst/>
+          </a:prstGeom>
+          <a:noFill/>
+        </p:spPr>
+        <p:txBody>
+          <a:bodyPr wrap="square">
+            <a:spAutoFit/>
+          </a:bodyPr>
+          <a:lstStyle/>
+          <a:p>
+            <a:pPr>
+              <a:spcAft>
+                <a:spcPts val="600"/>
+              </a:spcAft>
+            </a:pPr>
+            <a:r>
+              <a:rPr sz="1500">
+                <a:solidFill>
+                  <a:srgbClr val="22282E"/>
+                </a:solidFill>
+              </a:rPr>
+              <a:t>•  ❓ ¿Rol o usuario para una aplicación?</a:t>
+            </a:r>
+          </a:p>
+          <a:p>
+            <a:pPr>
+              <a:spcAft>
+                <a:spcPts val="600"/>
+              </a:spcAft>
+            </a:pPr>
+            <a:r>
+              <a:rPr sz="1500">
+                <a:solidFill>
+                  <a:srgbClr val="22282E"/>
+                </a:solidFill>
+              </a:rPr>
+              <a:t>•  Prefiere identidad de carga o rol temporal cuando la plataforma lo soporte. Reduce credenciales estáticas, pero todavía debes limitar permisos, proteger la carga y comprender expiración y revocación…</a:t>
+            </a:r>
+          </a:p>
+          <a:p>
+            <a:pPr>
+              <a:spcAft>
+                <a:spcPts val="600"/>
+              </a:spcAft>
+            </a:pPr>
+            <a:r>
+              <a:rPr sz="1500">
+                <a:solidFill>
+                  <a:srgbClr val="22282E"/>
+                </a:solidFill>
+              </a:rPr>
+              <a:t>•  ❓ ¿Qué pasa si una política de identidad permite algo y una de recurso lo deniega?</a:t>
+            </a:r>
+          </a:p>
+          <a:p>
+            <a:pPr>
+              <a:spcAft>
+                <a:spcPts val="600"/>
+              </a:spcAft>
+            </a:pPr>
+            <a:r>
+              <a:rPr sz="1500">
+                <a:solidFill>
+                  <a:srgbClr val="22282E"/>
+                </a:solidFill>
+              </a:rPr>
+              <a:t>•  Un Deny explícito aplicable prevalece sobre un Allow; sin Allow aplicable existe denegación implícita. La política relevante cambia por tipo de principal, recurso, sesión y acceso cross-account.</a:t>
+            </a:r>
+          </a:p>
+          <a:p>
+            <a:pPr>
+              <a:spcAft>
+                <a:spcPts val="600"/>
+              </a:spcAft>
+            </a:pPr>
+            <a:r>
+              <a:rPr sz="1500">
+                <a:solidFill>
+                  <a:srgbClr val="22282E"/>
+                </a:solidFill>
+              </a:rPr>
+              <a:t>•  ❓ ¿Cómo aplico privilegio mínimo sin frenar al equipo?</a:t>
+            </a:r>
+          </a:p>
+          <a:p>
+            <a:pPr>
+              <a:spcAft>
+                <a:spcPts val="600"/>
+              </a:spcAft>
+            </a:pPr>
+            <a:r>
+              <a:rPr sz="1500">
+                <a:solidFill>
+                  <a:srgbClr val="22282E"/>
+                </a:solidFill>
+              </a:rPr>
+              <a:t>•  Empieza permisivo pero mide: usa Access Analyzer/policy usage para ver qué se usa realmente y recorta lo no utilizado. Itera en vez de adivinar.</a:t>
+            </a:r>
+          </a:p>
+        </p:txBody>
+      </p:sp>
+    </p:spTree>
+  </p:cSld>
+  <p:clrMapOvr>
+    <a:masterClrMapping/>
+  </p:clrMapOvr>
+</p:sld>
+</file>
+
+<file path=ppt/slides/slide15.xml><?xml version="1.0" encoding="utf-8"?>
+<p:sld xmlns:a="http://schemas.openxmlformats.org/drawingml/2006/main" xmlns:p="http://schemas.openxmlformats.org/presentationml/2006/main" xmlns:r="http://schemas.openxmlformats.org/officeDocument/2006/relationships">
+  <p:cSld>
+    <p:spTree>
+      <p:nvGrpSpPr>
+        <p:cNvPr id="1" name=""/>
+        <p:cNvGrpSpPr/>
+        <p:nvPr/>
+      </p:nvGrpSpPr>
+      <p:grpSpPr/>
+      <p:sp>
+        <p:nvSpPr>
+          <p:cNvPr id="2" name="TextBox 1"/>
+          <p:cNvSpPr txBox="1"/>
+          <p:nvPr/>
+        </p:nvSpPr>
+        <p:spPr>
+          <a:xfrm>
+            <a:off x="457200" y="320040"/>
+            <a:ext cx="8229600" cy="822960"/>
+          </a:xfrm>
+          <a:prstGeom prst="rect">
+            <a:avLst/>
+          </a:prstGeom>
+          <a:noFill/>
+        </p:spPr>
+        <p:txBody>
+          <a:bodyPr wrap="square">
+            <a:spAutoFit/>
+          </a:bodyPr>
+          <a:lstStyle/>
+          <a:p>
+            <a:r>
+              <a:rPr sz="2600" b="1">
+                <a:solidFill>
+                  <a:srgbClr val="0B3D2E"/>
+                </a:solidFill>
+              </a:rPr>
+              <a:t>🔗 Referencias verificables y alcance</a:t>
+            </a:r>
+          </a:p>
+        </p:txBody>
+      </p:sp>
+      <p:sp>
+        <p:nvSpPr>
+          <p:cNvPr id="3" name="TextBox 2"/>
+          <p:cNvSpPr txBox="1"/>
+          <p:nvPr/>
+        </p:nvSpPr>
+        <p:spPr>
+          <a:xfrm>
+            <a:off x="457200" y="1280160"/>
+            <a:ext cx="8229600" cy="4937760"/>
+          </a:xfrm>
+          <a:prstGeom prst="rect">
+            <a:avLst/>
+          </a:prstGeom>
+          <a:noFill/>
+        </p:spPr>
+        <p:txBody>
+          <a:bodyPr wrap="square">
+            <a:spAutoFit/>
+          </a:bodyPr>
+          <a:lstStyle/>
+          <a:p>
+            <a:pPr>
+              <a:spcAft>
+                <a:spcPts val="600"/>
+              </a:spcAft>
+            </a:pPr>
+            <a:r>
+              <a:rPr sz="1500">
+                <a:solidFill>
+                  <a:srgbClr val="22282E"/>
+                </a:solidFill>
+              </a:rPr>
+              <a:t>•  AWS IAM User Guide. &lt;https://docs.aws.amazon.com/IAM/latest/UserGuide/&gt; — fuente oficial para identidades, roles, políticas y STS.</a:t>
+            </a:r>
+          </a:p>
+          <a:p>
+            <a:pPr>
+              <a:spcAft>
+                <a:spcPts val="600"/>
+              </a:spcAft>
+            </a:pPr>
+            <a:r>
+              <a:rPr sz="1500">
+                <a:solidFill>
+                  <a:srgbClr val="22282E"/>
+                </a:solidFill>
+              </a:rPr>
+              <a:t>•  AWS — IAM policy evaluation logic. &lt;https://docs.aws.amazon.com/IAM/latest/UserGuide/referencepoliciesevaluation-logic.html&gt; — reglas oficiales; revisar las variantes por principal y acceso…</a:t>
+            </a:r>
+          </a:p>
+          <a:p>
+            <a:pPr>
+              <a:spcAft>
+                <a:spcPts val="600"/>
+              </a:spcAft>
+            </a:pPr>
+            <a:r>
+              <a:rPr sz="1500">
+                <a:solidFill>
+                  <a:srgbClr val="22282E"/>
+                </a:solidFill>
+              </a:rPr>
+              <a:t>•  Microsoft Entra ID. &lt;https://learn.microsoft.com/en-us/entra/identity/&gt; — documentación oficial para identidad y federación Microsoft.</a:t>
+            </a:r>
+          </a:p>
+          <a:p>
+            <a:pPr>
+              <a:spcAft>
+                <a:spcPts val="600"/>
+              </a:spcAft>
+            </a:pPr>
+            <a:r>
+              <a:rPr sz="1500">
+                <a:solidFill>
+                  <a:srgbClr val="22282E"/>
+                </a:solidFill>
+              </a:rPr>
+              <a:t>•  Google Cloud IAM overview. &lt;https://cloud.google.com/iam/docs/overview&gt; — referencia oficial para principals, roles, políticas y herencia en Google Cloud.</a:t>
+            </a:r>
+          </a:p>
+          <a:p>
+            <a:pPr>
+              <a:spcAft>
+                <a:spcPts val="600"/>
+              </a:spcAft>
+            </a:pPr>
+            <a:r>
+              <a:rPr sz="1500">
+                <a:solidFill>
+                  <a:srgbClr val="22282E"/>
+                </a:solidFill>
+              </a:rPr>
+              <a:t>•  PMapper. &lt;https://github.com/nccgroup/PMapper&gt; — herramienta abierta para modelar relaciones AWS; los caminos deben validarse contra políticas efectivas.</a:t>
+            </a:r>
+          </a:p>
+          <a:p>
+            <a:pPr>
+              <a:spcAft>
+                <a:spcPts val="600"/>
+              </a:spcAft>
+            </a:pPr>
+            <a:r>
+              <a:rPr sz="1500">
+                <a:solidFill>
+                  <a:srgbClr val="22282E"/>
+                </a:solidFill>
+              </a:rPr>
+              <a:t>•  Rhino Security Labs — IAM privilege escalation. &lt;https://rhinosecuritylabs.com/aws/aws-privilege-escalation-methods-mitigation/&gt; — investigación técnica complementaria, no especificación de…</a:t>
+            </a:r>
+          </a:p>
+        </p:txBody>
+      </p:sp>
+    </p:spTree>
+  </p:cSld>
+  <p:clrMapOvr>
+    <a:masterClrMapping/>
+  </p:clrMapOvr>
+</p:sld>
+</file>
+
+<file path=ppt/slides/slide16.xml><?xml version="1.0" encoding="utf-8"?>
+<p:sld xmlns:a="http://schemas.openxmlformats.org/drawingml/2006/main" xmlns:p="http://schemas.openxmlformats.org/presentationml/2006/main" xmlns:r="http://schemas.openxmlformats.org/officeDocument/2006/relationships">
+  <p:cSld>
+    <p:spTree>
+      <p:nvGrpSpPr>
+        <p:cNvPr id="1" name=""/>
+        <p:cNvGrpSpPr/>
+        <p:nvPr/>
+      </p:nvGrpSpPr>
+      <p:grpSpPr/>
+      <p:sp>
+        <p:nvSpPr>
+          <p:cNvPr id="2" name="TextBox 1"/>
+          <p:cNvSpPr txBox="1"/>
+          <p:nvPr/>
+        </p:nvSpPr>
+        <p:spPr>
+          <a:xfrm>
+            <a:off x="457200" y="274320"/>
+            <a:ext cx="8229600" cy="640080"/>
+          </a:xfrm>
+          <a:prstGeom prst="rect">
+            <a:avLst/>
+          </a:prstGeom>
+          <a:noFill/>
+        </p:spPr>
+        <p:txBody>
+          <a:bodyPr wrap="square">
+            <a:spAutoFit/>
+          </a:bodyPr>
+          <a:lstStyle/>
+          <a:p>
+            <a:r>
+              <a:rPr sz="2200" b="1">
+                <a:solidFill>
+                  <a:srgbClr val="0B3D2E"/>
+                </a:solidFill>
+              </a:rPr>
+              <a:t>Diagrama de la clase</a:t>
+            </a:r>
+          </a:p>
+        </p:txBody>
+      </p:sp>
+      <p:pic>
+        <p:nvPicPr>
+          <p:cNvPr id="3" name="Picture 2" descr="0242be4682f3c953.png"/>
+          <p:cNvPicPr>
+            <a:picLocks noChangeAspect="1"/>
+          </p:cNvPicPr>
+          <p:nvPr/>
+        </p:nvPicPr>
+        <p:blipFill>
+          <a:blip r:embed="rId2"/>
+          <a:stretch>
+            <a:fillRect/>
+          </a:stretch>
+        </p:blipFill>
+        <p:spPr>
+          <a:xfrm>
+            <a:off x="457200" y="3122676"/>
+            <a:ext cx="8229600" cy="1252728"/>
+          </a:xfrm>
+          <a:prstGeom prst="rect">
+            <a:avLst/>
+          </a:prstGeom>
+        </p:spPr>
+      </p:pic>
     </p:spTree>
   </p:cSld>
   <p:clrMapOvr>
@@ -4122,7 +4708,7 @@
                   <a:srgbClr val="0B3D2E"/>
                 </a:solidFill>
               </a:rPr>
-              <a:t>📖 Definiciones y características</a:t>
+              <a:t>🧠 Explicación en profundidad</a:t>
             </a:r>
           </a:p>
         </p:txBody>
@@ -4160,97 +4746,67 @@
                   <a:srgbClr val="22282E"/>
                 </a:solidFill>
               </a:rPr>
-              <a:t>•  Usuario IAM: identidad de larga duración con credenciales propias. Clave: preferir roles; los usuarios con claves estáticas son un riesgo si se filtran.</a:t>
-            </a:r>
-          </a:p>
-          <a:p>
-            <a:pPr>
-              <a:spcAft>
-                <a:spcPts val="600"/>
-              </a:spcAft>
-            </a:pPr>
-            <a:r>
-              <a:rPr sz="1500">
-                <a:solidFill>
-                  <a:srgbClr val="22282E"/>
-                </a:solidFill>
-              </a:rPr>
-              <a:t>•  Rol IAM: identidad asumible que otorga credenciales temporales vía STS. Clave: sin secreto permanente, ideal para servicios y federación.</a:t>
-            </a:r>
-          </a:p>
-          <a:p>
-            <a:pPr>
-              <a:spcAft>
-                <a:spcPts val="600"/>
-              </a:spcAft>
-            </a:pPr>
-            <a:r>
-              <a:rPr sz="1500">
-                <a:solidFill>
-                  <a:srgbClr val="22282E"/>
-                </a:solidFill>
-              </a:rPr>
-              <a:t>•  Política: documento JSON con Effect, Action, Resource y Condition. Clave: define permisos de forma declarativa.</a:t>
-            </a:r>
-          </a:p>
-          <a:p>
-            <a:pPr>
-              <a:spcAft>
-                <a:spcPts val="600"/>
-              </a:spcAft>
-            </a:pPr>
-            <a:r>
-              <a:rPr sz="1500">
-                <a:solidFill>
-                  <a:srgbClr val="22282E"/>
-                </a:solidFill>
-              </a:rPr>
-              <a:t>•  Policy de recurso: adjunta al recurso (bucket, cola) en vez de a la identidad. Clave: permite acceso cross-account controlado.</a:t>
-            </a:r>
-          </a:p>
-          <a:p>
-            <a:pPr>
-              <a:spcAft>
-                <a:spcPts val="600"/>
-              </a:spcAft>
-            </a:pPr>
-            <a:r>
-              <a:rPr sz="1500">
-                <a:solidFill>
-                  <a:srgbClr val="22282E"/>
-                </a:solidFill>
-              </a:rPr>
-              <a:t>•  Permission boundary: techo máximo de permisos que una identidad puede tener. Clave: delega administración sin poder escalar.</a:t>
-            </a:r>
-          </a:p>
-          <a:p>
-            <a:pPr>
-              <a:spcAft>
-                <a:spcPts val="600"/>
-              </a:spcAft>
-            </a:pPr>
-            <a:r>
-              <a:rPr sz="1500">
-                <a:solidFill>
-                  <a:srgbClr val="22282E"/>
-                </a:solidFill>
-              </a:rPr>
-              <a:t>•  sts:AssumeRole: acción que cambia de identidad. Clave: base de la federación y de muchas rutas de escalada.</a:t>
-            </a:r>
-          </a:p>
-          <a:p>
-            <a:pPr>
-              <a:spcAft>
-                <a:spcPts val="600"/>
-              </a:spcAft>
-            </a:pPr>
-            <a:r>
-              <a:rPr sz="1500">
-                <a:solidFill>
-                  <a:srgbClr val="22282E"/>
-                </a:solidFill>
-              </a:rPr>
-              <a:t>•  Escalada de privilegios: aprovechar un permiso para obtener otro mayor. Clave: permisos como iam:PassRole + ec2:RunInstances equivalen a admin.</a:t>
+              <a:t>•  Una decisión IAM no es «el usuario tiene un rol». Es la evaluación de una solicitud concreta: principal y sesión, acción, recurso, contexto, políticas aplicables y límites superiores. Esta clase usa…</a:t>
+            </a:r>
+          </a:p>
+          <a:p>
+            <a:pPr>
+              <a:spcAft>
+                <a:spcPts val="600"/>
+              </a:spcAft>
+            </a:pPr>
+            <a:r>
+              <a:rPr sz="1500">
+                <a:solidFill>
+                  <a:srgbClr val="22282E"/>
+                </a:solidFill>
+              </a:rPr>
+              <a:t>•  El diagrama enseña que la credencial autentica y la política autoriza. En AWS una solicitud parte de denegación implícita; necesita un Allow aplicable y un Deny explícito prevalece. Sin embargo, la…</a:t>
+            </a:r>
+          </a:p>
+          <a:p>
+            <a:pPr>
+              <a:spcAft>
+                <a:spcPts val="600"/>
+              </a:spcAft>
+            </a:pPr>
+            <a:r>
+              <a:rPr sz="1500">
+                <a:solidFill>
+                  <a:srgbClr val="22282E"/>
+                </a:solidFill>
+              </a:rPr>
+              <a:t>•  Las personas deberían federarse desde un proveedor corporativo y obtener sesiones temporales con MFA o controles adaptativos. Las cargas usan identidades de servicio o roles vinculados a la…</a:t>
+            </a:r>
+          </a:p>
+          <a:p>
+            <a:pPr>
+              <a:spcAft>
+                <a:spcPts val="600"/>
+              </a:spcAft>
+            </a:pPr>
+            <a:r>
+              <a:rPr sz="1500">
+                <a:solidFill>
+                  <a:srgbClr val="22282E"/>
+                </a:solidFill>
+              </a:rPr>
+              <a:t>•  El permiso mínimo no se diseña una sola vez. Se parte de acciones necesarias, se acotan recursos, se agregan condiciones de región, red, etiquetas o servicio y se prueban casos permitidos y…</a:t>
+            </a:r>
+          </a:p>
+          <a:p>
+            <a:pPr>
+              <a:spcAft>
+                <a:spcPts val="600"/>
+              </a:spcAft>
+            </a:pPr>
+            <a:r>
+              <a:rPr sz="1500">
+                <a:solidFill>
+                  <a:srgbClr val="22282E"/>
+                </a:solidFill>
+              </a:rPr>
+              <a:t>•  iam:PassRole no equivale por sí solo a administrador. Se vuelve peligroso cuando el principal puede pasarlo a un servicio que ejecutará acciones bajo un rol más potente y puede controlar esa carga.…</a:t>
             </a:r>
           </a:p>
         </p:txBody>
@@ -4301,7 +4857,7 @@
                   <a:srgbClr val="0B3D2E"/>
                 </a:solidFill>
               </a:rPr>
-              <a:t>🧰 Herramientas y preparación</a:t>
+              <a:t>📖 Definiciones y características</a:t>
             </a:r>
           </a:p>
         </p:txBody>
@@ -4339,97 +4895,97 @@
                   <a:srgbClr val="22282E"/>
                 </a:solidFill>
               </a:rPr>
-              <a:t>•  CLI del proveedor (aws, az, gcloud) con una cuenta de laboratorio.</a:t>
-            </a:r>
-          </a:p>
-          <a:p>
-            <a:pPr>
-              <a:spcAft>
-                <a:spcPts val="600"/>
-              </a:spcAft>
-            </a:pPr>
-            <a:r>
-              <a:rPr sz="1500">
-                <a:solidFill>
-                  <a:srgbClr val="22282E"/>
-                </a:solidFill>
-              </a:rPr>
-              <a:t>•  Prowler y ScoutSuite para auditar IAM (se profundiza en la clase 231).</a:t>
-            </a:r>
-          </a:p>
-          <a:p>
-            <a:pPr>
-              <a:spcAft>
-                <a:spcPts val="600"/>
-              </a:spcAft>
-            </a:pPr>
-            <a:r>
-              <a:rPr sz="1500">
-                <a:solidFill>
-                  <a:srgbClr val="22282E"/>
-                </a:solidFill>
-              </a:rPr>
-              <a:t>•  Pacu (framework de explotación AWS) y PMapper para grafos de escalada IAM. Úsalos solo en tu propia cuenta de laboratorio.</a:t>
-            </a:r>
-          </a:p>
-          <a:p>
-            <a:pPr>
-              <a:spcAft>
-                <a:spcPts val="600"/>
-              </a:spcAft>
-            </a:pPr>
-            <a:r>
-              <a:rPr sz="1500">
-                <a:solidFill>
-                  <a:srgbClr val="22282E"/>
-                </a:solidFill>
-              </a:rPr>
-              <a:t>•  aws iam list-users</a:t>
-            </a:r>
-          </a:p>
-          <a:p>
-            <a:pPr>
-              <a:spcAft>
-                <a:spcPts val="600"/>
-              </a:spcAft>
-            </a:pPr>
-            <a:r>
-              <a:rPr sz="1500">
-                <a:solidFill>
-                  <a:srgbClr val="22282E"/>
-                </a:solidFill>
-              </a:rPr>
-              <a:t>•  aws iam list-access-keys --user-name lab-user</a:t>
-            </a:r>
-          </a:p>
-          <a:p>
-            <a:pPr>
-              <a:spcAft>
-                <a:spcPts val="600"/>
-              </a:spcAft>
-            </a:pPr>
-            <a:r>
-              <a:rPr sz="1500">
-                <a:solidFill>
-                  <a:srgbClr val="22282E"/>
-                </a:solidFill>
-              </a:rPr>
-              <a:t>•  aws iam simulate-principal-policy \</a:t>
-            </a:r>
-          </a:p>
-          <a:p>
-            <a:pPr>
-              <a:spcAft>
-                <a:spcPts val="600"/>
-              </a:spcAft>
-            </a:pPr>
-            <a:r>
-              <a:rPr sz="1500">
-                <a:solidFill>
-                  <a:srgbClr val="22282E"/>
-                </a:solidFill>
-              </a:rPr>
-              <a:t>•  --policy-source-arn arn:aws:iam::123456789012:user/lab-user \</a:t>
+              <a:t>•  Usuario IAM: identidad de larga duración con credenciales propias. Clave: preferir roles; los usuarios con claves estáticas son un riesgo si se filtran.</a:t>
+            </a:r>
+          </a:p>
+          <a:p>
+            <a:pPr>
+              <a:spcAft>
+                <a:spcPts val="600"/>
+              </a:spcAft>
+            </a:pPr>
+            <a:r>
+              <a:rPr sz="1500">
+                <a:solidFill>
+                  <a:srgbClr val="22282E"/>
+                </a:solidFill>
+              </a:rPr>
+              <a:t>•  Rol IAM: identidad asumible que otorga credenciales temporales vía STS. Clave: sin secreto permanente, ideal para servicios y federación.</a:t>
+            </a:r>
+          </a:p>
+          <a:p>
+            <a:pPr>
+              <a:spcAft>
+                <a:spcPts val="600"/>
+              </a:spcAft>
+            </a:pPr>
+            <a:r>
+              <a:rPr sz="1500">
+                <a:solidFill>
+                  <a:srgbClr val="22282E"/>
+                </a:solidFill>
+              </a:rPr>
+              <a:t>•  Política: documento JSON con Effect, Action, Resource y Condition. Clave: define permisos de forma declarativa.</a:t>
+            </a:r>
+          </a:p>
+          <a:p>
+            <a:pPr>
+              <a:spcAft>
+                <a:spcPts val="600"/>
+              </a:spcAft>
+            </a:pPr>
+            <a:r>
+              <a:rPr sz="1500">
+                <a:solidFill>
+                  <a:srgbClr val="22282E"/>
+                </a:solidFill>
+              </a:rPr>
+              <a:t>•  Policy de recurso: adjunta al recurso (bucket, cola) en vez de a la identidad. Clave: permite acceso cross-account controlado.</a:t>
+            </a:r>
+          </a:p>
+          <a:p>
+            <a:pPr>
+              <a:spcAft>
+                <a:spcPts val="600"/>
+              </a:spcAft>
+            </a:pPr>
+            <a:r>
+              <a:rPr sz="1500">
+                <a:solidFill>
+                  <a:srgbClr val="22282E"/>
+                </a:solidFill>
+              </a:rPr>
+              <a:t>•  Permission boundary: conjunto que limita permisos máximos otorgables por políticas de identidad. Clave: no concede acceso y debe combinarse con otros límites y políticas.</a:t>
+            </a:r>
+          </a:p>
+          <a:p>
+            <a:pPr>
+              <a:spcAft>
+                <a:spcPts val="600"/>
+              </a:spcAft>
+            </a:pPr>
+            <a:r>
+              <a:rPr sz="1500">
+                <a:solidFill>
+                  <a:srgbClr val="22282E"/>
+                </a:solidFill>
+              </a:rPr>
+              <a:t>•  sts:AssumeRole: acción que cambia de identidad. Clave: base de la federación y de muchas rutas de escalada.</a:t>
+            </a:r>
+          </a:p>
+          <a:p>
+            <a:pPr>
+              <a:spcAft>
+                <a:spcPts val="600"/>
+              </a:spcAft>
+            </a:pPr>
+            <a:r>
+              <a:rPr sz="1500">
+                <a:solidFill>
+                  <a:srgbClr val="22282E"/>
+                </a:solidFill>
+              </a:rPr>
+              <a:t>•  Escalada de privilegios: cadena que permite obtener capacidades superiores a las previstas. Clave: requiere demostrar acciones, recursos, rol destino, trust policy y control efectivo de la carga.</a:t>
             </a:r>
           </a:p>
         </p:txBody>
@@ -4480,7 +5036,7 @@
                   <a:srgbClr val="0B3D2E"/>
                 </a:solidFill>
               </a:rPr>
-              <a:t>🧪 Laboratorio guiado</a:t>
+              <a:t>🔍 Caso razonado — desplegar una Lambda con `PassRole`</a:t>
             </a:r>
           </a:p>
         </p:txBody>
@@ -4518,97 +5074,22 @@
                   <a:srgbClr val="22282E"/>
                 </a:solidFill>
               </a:rPr>
-              <a:t>•  Crea un usuario lab-user sin permisos y un rol lab-admin-role con AdministratorAccess.</a:t>
-            </a:r>
-          </a:p>
-          <a:p>
-            <a:pPr>
-              <a:spcAft>
-                <a:spcPts val="600"/>
-              </a:spcAft>
-            </a:pPr>
-            <a:r>
-              <a:rPr sz="1500">
-                <a:solidFill>
-                  <a:srgbClr val="22282E"/>
-                </a:solidFill>
-              </a:rPr>
-              <a:t>•  Adjunta a lab-user una política que solo permita iam:PassRole y ec2:RunInstances.</a:t>
-            </a:r>
-          </a:p>
-          <a:p>
-            <a:pPr>
-              <a:spcAft>
-                <a:spcPts val="600"/>
-              </a:spcAft>
-            </a:pPr>
-            <a:r>
-              <a:rPr sz="1500">
-                <a:solidFill>
-                  <a:srgbClr val="22282E"/>
-                </a:solidFill>
-              </a:rPr>
-              <a:t>•  Con PMapper, genera el grafo de la cuenta: pmapper graph create y luego pmapper query "who can do iam: with ". Observa cómo el usuario aparente-mínimo puede escalar a admin lanzando una instancia con el rol admin.</a:t>
-            </a:r>
-          </a:p>
-          <a:p>
-            <a:pPr>
-              <a:spcAft>
-                <a:spcPts val="600"/>
-              </a:spcAft>
-            </a:pPr>
-            <a:r>
-              <a:rPr sz="1500">
-                <a:solidFill>
-                  <a:srgbClr val="22282E"/>
-                </a:solidFill>
-              </a:rPr>
-              <a:t>•  Reproduce la ruta manualmente: lanza una instancia EC2 pasando lab-admin-role y obtén sus credenciales temporales desde el servicio de metadatos.</a:t>
-            </a:r>
-          </a:p>
-          <a:p>
-            <a:pPr>
-              <a:spcAft>
-                <a:spcPts val="600"/>
-              </a:spcAft>
-            </a:pPr>
-            <a:r>
-              <a:rPr sz="1500">
-                <a:solidFill>
-                  <a:srgbClr val="22282E"/>
-                </a:solidFill>
-              </a:rPr>
-              <a:t>•  Mitiga: aplica un permission boundary a lab-user y añade una Condition que restrinja qué roles puede pasar (iam:PassedToService). Repite el ataque y verifica que ahora falla.</a:t>
-            </a:r>
-          </a:p>
-          <a:p>
-            <a:pPr>
-              <a:spcAft>
-                <a:spcPts val="600"/>
-              </a:spcAft>
-            </a:pPr>
-            <a:r>
-              <a:rPr sz="1500">
-                <a:solidFill>
-                  <a:srgbClr val="22282E"/>
-                </a:solidFill>
-              </a:rPr>
-              <a:t>•  Audita la cuenta con prowler aws -c iam y revisa hallazgos de claves inactivas y políticas con comodín .</a:t>
-            </a:r>
-          </a:p>
-          <a:p>
-            <a:pPr>
-              <a:spcAft>
-                <a:spcPts val="600"/>
-              </a:spcAft>
-            </a:pPr>
-            <a:r>
-              <a:rPr sz="1500">
-                <a:solidFill>
-                  <a:srgbClr val="22282E"/>
-                </a:solidFill>
-              </a:rPr>
-              <a:t>•  Elimina las credenciales de larga duración y sustitúyelas por roles asumibles.</a:t>
+              <a:t>•  Una identidad puede crear funciones y pasar un rol con lectura de un bucket sensible. Si también puede definir el código, invocar la función y recuperar su salida, existe una ruta hacia esos datos.…</a:t>
+            </a:r>
+          </a:p>
+          <a:p>
+            <a:pPr>
+              <a:spcAft>
+                <a:spcPts val="600"/>
+              </a:spcAft>
+            </a:pPr>
+            <a:r>
+              <a:rPr sz="1500">
+                <a:solidFill>
+                  <a:srgbClr val="22282E"/>
+                </a:solidFill>
+              </a:rPr>
+              <a:t>•  La corrección no es eliminar todo PassRole: se restringe el ARN del rol, iam:PassedToService, acciones de creación y destino de salida; se separan roles de despliegue y ejecución. Las pruebas…</a:t>
             </a:r>
           </a:p>
         </p:txBody>
@@ -4659,7 +5140,7 @@
                   <a:srgbClr val="0B3D2E"/>
                 </a:solidFill>
               </a:rPr>
-              <a:t>✍️ Ejercicios</a:t>
+              <a:t>✅ Criterio de dominio</a:t>
             </a:r>
           </a:p>
         </p:txBody>
@@ -4697,82 +5178,7 @@
                   <a:srgbClr val="22282E"/>
                 </a:solidFill>
               </a:rPr>
-              <a:t>•  Escribe una política que permita listar un bucket concreto pero denegar borrar objetos.</a:t>
-            </a:r>
-          </a:p>
-          <a:p>
-            <a:pPr>
-              <a:spcAft>
-                <a:spcPts val="600"/>
-              </a:spcAft>
-            </a:pPr>
-            <a:r>
-              <a:rPr sz="1500">
-                <a:solidFill>
-                  <a:srgbClr val="22282E"/>
-                </a:solidFill>
-              </a:rPr>
-              <a:t>•  Convierte una integración basada en clave estática en un rol asumido por un servicio.</a:t>
-            </a:r>
-          </a:p>
-          <a:p>
-            <a:pPr>
-              <a:spcAft>
-                <a:spcPts val="600"/>
-              </a:spcAft>
-            </a:pPr>
-            <a:r>
-              <a:rPr sz="1500">
-                <a:solidFill>
-                  <a:srgbClr val="22282E"/>
-                </a:solidFill>
-              </a:rPr>
-              <a:t>•  Explica el resultado de una petición con un Deny explícito y un Allow simultáneos.</a:t>
-            </a:r>
-          </a:p>
-          <a:p>
-            <a:pPr>
-              <a:spcAft>
-                <a:spcPts val="600"/>
-              </a:spcAft>
-            </a:pPr>
-            <a:r>
-              <a:rPr sz="1500">
-                <a:solidFill>
-                  <a:srgbClr val="22282E"/>
-                </a:solidFill>
-              </a:rPr>
-              <a:t>•  Añade una Condition que exija MFA para acciones destructivas.</a:t>
-            </a:r>
-          </a:p>
-          <a:p>
-            <a:pPr>
-              <a:spcAft>
-                <a:spcPts val="600"/>
-              </a:spcAft>
-            </a:pPr>
-            <a:r>
-              <a:rPr sz="1500">
-                <a:solidFill>
-                  <a:srgbClr val="22282E"/>
-                </a:solidFill>
-              </a:rPr>
-              <a:t>•  Usa PMapper para encontrar todas las identidades que pueden asumir un rol admin.</a:t>
-            </a:r>
-          </a:p>
-          <a:p>
-            <a:pPr>
-              <a:spcAft>
-                <a:spcPts val="600"/>
-              </a:spcAft>
-            </a:pPr>
-            <a:r>
-              <a:rPr sz="1500">
-                <a:solidFill>
-                  <a:srgbClr val="22282E"/>
-                </a:solidFill>
-              </a:rPr>
-              <a:t>•  Diseña un esquema de permission boundaries para un equipo que autoadministra sus recursos.</a:t>
+              <a:t>•  Dominas la clase cuando puedes explicar una decisión con principal, sesión, acción, recurso, contexto y cada política aplicable; produces pruebas allow/deny; y demuestras o refutas una ruta de…</a:t>
             </a:r>
           </a:p>
         </p:txBody>
@@ -4823,7 +5229,7 @@
                   <a:srgbClr val="0B3D2E"/>
                 </a:solidFill>
               </a:rPr>
-              <a:t>📝 Reto verificable</a:t>
+              <a:t>🧰 Herramientas y preparación</a:t>
             </a:r>
           </a:p>
         </p:txBody>
@@ -4861,67 +5267,37 @@
                   <a:srgbClr val="22282E"/>
                 </a:solidFill>
               </a:rPr>
-              <a:t>•  Parte de una política demasiado amplia ("Action": "", "Resource": "") y refactorízala a</a:t>
-            </a:r>
-          </a:p>
-          <a:p>
-            <a:pPr>
-              <a:spcAft>
-                <a:spcPts val="600"/>
-              </a:spcAft>
-            </a:pPr>
-            <a:r>
-              <a:rPr sz="1500">
-                <a:solidFill>
-                  <a:srgbClr val="22282E"/>
-                </a:solidFill>
-              </a:rPr>
-              <a:t>•  privilegio mínimo para un caso de uso concreto (una app que lee de una tabla y escribe en una cola).</a:t>
-            </a:r>
-          </a:p>
-          <a:p>
-            <a:pPr>
-              <a:spcAft>
-                <a:spcPts val="600"/>
-              </a:spcAft>
-            </a:pPr>
-            <a:r>
-              <a:rPr sz="1500">
-                <a:solidFill>
-                  <a:srgbClr val="22282E"/>
-                </a:solidFill>
-              </a:rPr>
-              <a:t>•  Criterio de aceptación: la política final solo incluye las acciones estrictamente necesarias sobre</a:t>
-            </a:r>
-          </a:p>
-          <a:p>
-            <a:pPr>
-              <a:spcAft>
-                <a:spcPts val="600"/>
-              </a:spcAft>
-            </a:pPr>
-            <a:r>
-              <a:rPr sz="1500">
-                <a:solidFill>
-                  <a:srgbClr val="22282E"/>
-                </a:solidFill>
-              </a:rPr>
-              <a:t>•  los ARNs concretos, incluye al menos una Condition, y simulate-principal-policy confirma que las</a:t>
-            </a:r>
-          </a:p>
-          <a:p>
-            <a:pPr>
-              <a:spcAft>
-                <a:spcPts val="600"/>
-              </a:spcAft>
-            </a:pPr>
-            <a:r>
-              <a:rPr sz="1500">
-                <a:solidFill>
-                  <a:srgbClr val="22282E"/>
-                </a:solidFill>
-              </a:rPr>
-              <a:t>•  acciones legítimas se permiten y una acción no relacionada se deniega.</a:t>
+              <a:t>•  CLI del proveedor (aws, az, gcloud) con una cuenta de laboratorio.</a:t>
+            </a:r>
+          </a:p>
+          <a:p>
+            <a:pPr>
+              <a:spcAft>
+                <a:spcPts val="600"/>
+              </a:spcAft>
+            </a:pPr>
+            <a:r>
+              <a:rPr sz="1500">
+                <a:solidFill>
+                  <a:srgbClr val="22282E"/>
+                </a:solidFill>
+              </a:rPr>
+              <a:t>•  Prowler y ScoutSuite para auditar IAM (se profundiza en la clase 231).</a:t>
+            </a:r>
+          </a:p>
+          <a:p>
+            <a:pPr>
+              <a:spcAft>
+                <a:spcPts val="600"/>
+              </a:spcAft>
+            </a:pPr>
+            <a:r>
+              <a:rPr sz="1500">
+                <a:solidFill>
+                  <a:srgbClr val="22282E"/>
+                </a:solidFill>
+              </a:rPr>
+              <a:t>•  Pacu (framework de explotación AWS) y PMapper para grafos de escalada IAM. Úsalos solo en tu propia cuenta de laboratorio.</a:t>
             </a:r>
           </a:p>
         </p:txBody>
